--- a/자바/이클립스에서 데이터베이스 연결해 사용하는 방법-11.pptx
+++ b/자바/이클립스에서 데이터베이스 연결해 사용하는 방법-11.pptx
@@ -5,7 +5,7 @@
     <p:sldMasterId id="2147483732" r:id="rId1"/>
   </p:sldMasterIdLst>
   <p:notesMasterIdLst>
-    <p:notesMasterId r:id="rId19"/>
+    <p:notesMasterId r:id="rId20"/>
   </p:notesMasterIdLst>
   <p:sldIdLst>
     <p:sldId id="268" r:id="rId2"/>
@@ -25,6 +25,7 @@
     <p:sldId id="272" r:id="rId16"/>
     <p:sldId id="258" r:id="rId17"/>
     <p:sldId id="259" r:id="rId18"/>
+    <p:sldId id="276" r:id="rId19"/>
   </p:sldIdLst>
   <p:sldSz cx="9144000" cy="6858000" type="screen4x3"/>
   <p:notesSz cx="6858000" cy="9144000"/>
@@ -125,7 +126,7 @@
   </p:defaultTextStyle>
   <p:extLst>
     <p:ext uri="{EFAFB233-063F-42B5-8137-9DF3F51BA10A}">
-      <p15:sldGuideLst xmlns:p15="http://schemas.microsoft.com/office/powerpoint/2012/main" xmlns="">
+      <p15:sldGuideLst xmlns="" xmlns:p15="http://schemas.microsoft.com/office/powerpoint/2012/main">
         <p15:guide id="1" orient="horz" pos="2160">
           <p15:clr>
             <a:srgbClr val="A4A3A4"/>
@@ -225,7 +226,7 @@
             <a:fld id="{3A247C8F-E0DB-4626-913F-CA1AAF6DF481}" type="datetimeFigureOut">
               <a:rPr lang="ko-KR" altLang="en-US" smtClean="0"/>
               <a:pPr/>
-              <a:t>2022-06-14</a:t>
+              <a:t>2022-06-16</a:t>
             </a:fld>
             <a:endParaRPr lang="ko-KR" altLang="en-US"/>
           </a:p>
@@ -394,7 +395,7 @@
     </p:spTree>
     <p:extLst>
       <p:ext uri="{BB962C8B-B14F-4D97-AF65-F5344CB8AC3E}">
-        <p14:creationId xmlns:p14="http://schemas.microsoft.com/office/powerpoint/2010/main" xmlns="" val="967588107"/>
+        <p14:creationId xmlns="" xmlns:p14="http://schemas.microsoft.com/office/powerpoint/2010/main" val="967588107"/>
       </p:ext>
     </p:extLst>
   </p:cSld>
@@ -609,7 +610,132 @@
     </p:spTree>
     <p:extLst>
       <p:ext uri="{BB962C8B-B14F-4D97-AF65-F5344CB8AC3E}">
-        <p14:creationId xmlns:p14="http://schemas.microsoft.com/office/powerpoint/2010/main" xmlns="" val="2499013622"/>
+        <p14:creationId xmlns="" xmlns:p14="http://schemas.microsoft.com/office/powerpoint/2010/main" val="2499013622"/>
+      </p:ext>
+    </p:extLst>
+  </p:cSld>
+  <p:clrMapOvr>
+    <a:masterClrMapping/>
+  </p:clrMapOvr>
+</p:notes>
+</file>
+
+<file path=ppt/notesSlides/notesSlide2.xml><?xml version="1.0" encoding="utf-8"?>
+<p:notes xmlns:a="http://schemas.openxmlformats.org/drawingml/2006/main" xmlns:r="http://schemas.openxmlformats.org/officeDocument/2006/relationships" xmlns:p="http://schemas.openxmlformats.org/presentationml/2006/main">
+  <p:cSld>
+    <p:spTree>
+      <p:nvGrpSpPr>
+        <p:cNvPr id="1" name=""/>
+        <p:cNvGrpSpPr/>
+        <p:nvPr/>
+      </p:nvGrpSpPr>
+      <p:grpSpPr>
+        <a:xfrm>
+          <a:off x="0" y="0"/>
+          <a:ext cx="0" cy="0"/>
+          <a:chOff x="0" y="0"/>
+          <a:chExt cx="0" cy="0"/>
+        </a:xfrm>
+      </p:grpSpPr>
+      <p:sp>
+        <p:nvSpPr>
+          <p:cNvPr id="7" name="Rectangle 7"/>
+          <p:cNvSpPr>
+            <a:spLocks noGrp="1" noChangeArrowheads="1"/>
+          </p:cNvSpPr>
+          <p:nvPr>
+            <p:ph type="sldNum" sz="quarter" idx="5"/>
+          </p:nvPr>
+        </p:nvSpPr>
+        <p:spPr>
+          <a:ln/>
+        </p:spPr>
+        <p:txBody>
+          <a:bodyPr/>
+          <a:lstStyle/>
+          <a:p>
+            <a:fld id="{B875BA7F-4EDE-4ADB-BB76-7DB36EC9F0B5}" type="slidenum">
+              <a:rPr lang="en-US" altLang="ko-KR"/>
+              <a:pPr/>
+              <a:t>18</a:t>
+            </a:fld>
+            <a:endParaRPr lang="en-US" altLang="ko-KR"/>
+          </a:p>
+        </p:txBody>
+      </p:sp>
+      <p:sp>
+        <p:nvSpPr>
+          <p:cNvPr id="700418" name="Rectangle 2"/>
+          <p:cNvSpPr>
+            <a:spLocks noGrp="1" noRot="1" noChangeAspect="1" noChangeArrowheads="1" noTextEdit="1"/>
+          </p:cNvSpPr>
+          <p:nvPr>
+            <p:ph type="sldImg"/>
+          </p:nvPr>
+        </p:nvSpPr>
+        <p:spPr bwMode="auto">
+          <a:xfrm>
+            <a:off x="1143000" y="685800"/>
+            <a:ext cx="4572000" cy="3429000"/>
+          </a:xfrm>
+          <a:prstGeom prst="rect">
+            <a:avLst/>
+          </a:prstGeom>
+          <a:solidFill>
+            <a:srgbClr val="FFFFFF"/>
+          </a:solidFill>
+          <a:ln>
+            <a:solidFill>
+              <a:srgbClr val="000000"/>
+            </a:solidFill>
+            <a:miter lim="800000"/>
+            <a:headEnd/>
+            <a:tailEnd/>
+          </a:ln>
+        </p:spPr>
+      </p:sp>
+      <p:sp>
+        <p:nvSpPr>
+          <p:cNvPr id="700419" name="Rectangle 3"/>
+          <p:cNvSpPr>
+            <a:spLocks noGrp="1" noChangeArrowheads="1"/>
+          </p:cNvSpPr>
+          <p:nvPr>
+            <p:ph type="body" idx="1"/>
+          </p:nvPr>
+        </p:nvSpPr>
+        <p:spPr bwMode="auto">
+          <a:xfrm>
+            <a:off x="914400" y="4343400"/>
+            <a:ext cx="5029200" cy="4114800"/>
+          </a:xfrm>
+          <a:prstGeom prst="rect">
+            <a:avLst/>
+          </a:prstGeom>
+          <a:solidFill>
+            <a:srgbClr val="FFFFFF"/>
+          </a:solidFill>
+          <a:ln>
+            <a:solidFill>
+              <a:srgbClr val="000000"/>
+            </a:solidFill>
+            <a:miter lim="800000"/>
+            <a:headEnd/>
+            <a:tailEnd/>
+          </a:ln>
+        </p:spPr>
+        <p:txBody>
+          <a:bodyPr/>
+          <a:lstStyle/>
+          <a:p>
+            <a:endParaRPr lang="ko-KR" altLang="ko-KR"/>
+          </a:p>
+        </p:txBody>
+      </p:sp>
+    </p:spTree>
+    <p:extLst>
+      <p:ext uri="{BB962C8B-B14F-4D97-AF65-F5344CB8AC3E}">
+        <p14:creationId xmlns:p14="http://schemas.microsoft.com/office/powerpoint/2010/main" xmlns="" val="2835135345"/>
       </p:ext>
     </p:extLst>
   </p:cSld>
@@ -854,7 +980,7 @@
             <a:fld id="{3E5B501D-8764-46E5-A065-B5FB23B7CC26}" type="datetimeFigureOut">
               <a:rPr lang="ko-KR" altLang="en-US" smtClean="0"/>
               <a:pPr/>
-              <a:t>2022-06-14</a:t>
+              <a:t>2022-06-16</a:t>
             </a:fld>
             <a:endParaRPr lang="ko-KR" altLang="en-US"/>
           </a:p>
@@ -1035,7 +1161,7 @@
             <a:fld id="{3E5B501D-8764-46E5-A065-B5FB23B7CC26}" type="datetimeFigureOut">
               <a:rPr lang="ko-KR" altLang="en-US" smtClean="0"/>
               <a:pPr/>
-              <a:t>2022-06-14</a:t>
+              <a:t>2022-06-16</a:t>
             </a:fld>
             <a:endParaRPr lang="ko-KR" altLang="en-US"/>
           </a:p>
@@ -1337,7 +1463,7 @@
             <a:fld id="{3E5B501D-8764-46E5-A065-B5FB23B7CC26}" type="datetimeFigureOut">
               <a:rPr lang="ko-KR" altLang="en-US" smtClean="0"/>
               <a:pPr/>
-              <a:t>2022-06-14</a:t>
+              <a:t>2022-06-16</a:t>
             </a:fld>
             <a:endParaRPr lang="ko-KR" altLang="en-US"/>
           </a:p>
@@ -1645,7 +1771,7 @@
     </p:spTree>
     <p:extLst>
       <p:ext uri="{BB962C8B-B14F-4D97-AF65-F5344CB8AC3E}">
-        <p14:creationId xmlns:p14="http://schemas.microsoft.com/office/powerpoint/2010/main" xmlns="" val="2309306513"/>
+        <p14:creationId xmlns="" xmlns:p14="http://schemas.microsoft.com/office/powerpoint/2010/main" val="2309306513"/>
       </p:ext>
     </p:extLst>
   </p:cSld>
@@ -1804,7 +1930,7 @@
             <a:fld id="{3E5B501D-8764-46E5-A065-B5FB23B7CC26}" type="datetimeFigureOut">
               <a:rPr lang="ko-KR" altLang="en-US" smtClean="0"/>
               <a:pPr/>
-              <a:t>2022-06-14</a:t>
+              <a:t>2022-06-16</a:t>
             </a:fld>
             <a:endParaRPr lang="ko-KR" altLang="en-US"/>
           </a:p>
@@ -2226,7 +2352,7 @@
             <a:fld id="{3E5B501D-8764-46E5-A065-B5FB23B7CC26}" type="datetimeFigureOut">
               <a:rPr lang="ko-KR" altLang="en-US" smtClean="0"/>
               <a:pPr/>
-              <a:t>2022-06-14</a:t>
+              <a:t>2022-06-16</a:t>
             </a:fld>
             <a:endParaRPr lang="ko-KR" altLang="en-US"/>
           </a:p>
@@ -2563,7 +2689,7 @@
             <a:fld id="{3E5B501D-8764-46E5-A065-B5FB23B7CC26}" type="datetimeFigureOut">
               <a:rPr lang="ko-KR" altLang="en-US" smtClean="0"/>
               <a:pPr/>
-              <a:t>2022-06-14</a:t>
+              <a:t>2022-06-16</a:t>
             </a:fld>
             <a:endParaRPr lang="ko-KR" altLang="en-US"/>
           </a:p>
@@ -2682,7 +2808,7 @@
             <a:fld id="{3E5B501D-8764-46E5-A065-B5FB23B7CC26}" type="datetimeFigureOut">
               <a:rPr lang="ko-KR" altLang="en-US" smtClean="0"/>
               <a:pPr/>
-              <a:t>2022-06-14</a:t>
+              <a:t>2022-06-16</a:t>
             </a:fld>
             <a:endParaRPr lang="ko-KR" altLang="en-US"/>
           </a:p>
@@ -3394,7 +3520,7 @@
             <a:fld id="{3E5B501D-8764-46E5-A065-B5FB23B7CC26}" type="datetimeFigureOut">
               <a:rPr lang="ko-KR" altLang="en-US" smtClean="0"/>
               <a:pPr/>
-              <a:t>2022-06-14</a:t>
+              <a:t>2022-06-16</a:t>
             </a:fld>
             <a:endParaRPr lang="ko-KR" altLang="en-US"/>
           </a:p>
@@ -3486,7 +3612,7 @@
             <a:fld id="{3E5B501D-8764-46E5-A065-B5FB23B7CC26}" type="datetimeFigureOut">
               <a:rPr lang="ko-KR" altLang="en-US" smtClean="0"/>
               <a:pPr/>
-              <a:t>2022-06-14</a:t>
+              <a:t>2022-06-16</a:t>
             </a:fld>
             <a:endParaRPr lang="ko-KR" altLang="en-US"/>
           </a:p>
@@ -3769,7 +3895,7 @@
             <a:fld id="{3E5B501D-8764-46E5-A065-B5FB23B7CC26}" type="datetimeFigureOut">
               <a:rPr lang="ko-KR" altLang="en-US" smtClean="0"/>
               <a:pPr/>
-              <a:t>2022-06-14</a:t>
+              <a:t>2022-06-16</a:t>
             </a:fld>
             <a:endParaRPr lang="ko-KR" altLang="en-US"/>
           </a:p>
@@ -4154,7 +4280,7 @@
             <a:fld id="{3E5B501D-8764-46E5-A065-B5FB23B7CC26}" type="datetimeFigureOut">
               <a:rPr lang="ko-KR" altLang="en-US" smtClean="0"/>
               <a:pPr/>
-              <a:t>2022-06-14</a:t>
+              <a:t>2022-06-16</a:t>
             </a:fld>
             <a:endParaRPr lang="ko-KR" altLang="en-US"/>
           </a:p>
@@ -4563,7 +4689,7 @@
             <a:fld id="{3E5B501D-8764-46E5-A065-B5FB23B7CC26}" type="datetimeFigureOut">
               <a:rPr lang="ko-KR" altLang="en-US" smtClean="0"/>
               <a:pPr/>
-              <a:t>2022-06-14</a:t>
+              <a:t>2022-06-16</a:t>
             </a:fld>
             <a:endParaRPr lang="ko-KR" altLang="en-US"/>
           </a:p>
@@ -5460,7 +5586,7 @@
     </p:spTree>
     <p:extLst>
       <p:ext uri="{BB962C8B-B14F-4D97-AF65-F5344CB8AC3E}">
-        <p14:creationId xmlns:p14="http://schemas.microsoft.com/office/powerpoint/2010/main" xmlns="" val="2245560471"/>
+        <p14:creationId xmlns="" xmlns:p14="http://schemas.microsoft.com/office/powerpoint/2010/main" val="2245560471"/>
       </p:ext>
     </p:extLst>
   </p:cSld>
@@ -6044,17 +6170,8 @@
             </a:r>
             <a:r>
               <a:rPr lang="en-US" sz="2400" dirty="0" smtClean="0"/>
-              <a:t>   </a:t>
-            </a:r>
-            <a:r>
-              <a:rPr lang="en-US" sz="2400" dirty="0" smtClean="0"/>
-              <a:t>C:\</a:t>
-            </a:r>
-            <a:r>
-              <a:rPr lang="en-US" sz="2400" dirty="0" smtClean="0"/>
-              <a:t>oraclexe\app\oracle\product\11.2.0\server\jdbc\lib\ojdbc6.jar</a:t>
-            </a:r>
-            <a:endParaRPr lang="en-US" sz="2400" dirty="0" smtClean="0"/>
+              <a:t>   C:\oraclexe\app\oracle\product\11.2.0\server\jdbc\lib\ojdbc6.jar</a:t>
+            </a:r>
           </a:p>
           <a:p>
             <a:r>
@@ -7116,6 +7233,326 @@
 </p:sld>
 </file>
 
+<file path=ppt/slides/slide18.xml><?xml version="1.0" encoding="utf-8"?>
+<p:sld xmlns:a="http://schemas.openxmlformats.org/drawingml/2006/main" xmlns:r="http://schemas.openxmlformats.org/officeDocument/2006/relationships" xmlns:p="http://schemas.openxmlformats.org/presentationml/2006/main">
+  <p:cSld>
+    <p:spTree>
+      <p:nvGrpSpPr>
+        <p:cNvPr id="1" name=""/>
+        <p:cNvGrpSpPr/>
+        <p:nvPr/>
+      </p:nvGrpSpPr>
+      <p:grpSpPr>
+        <a:xfrm>
+          <a:off x="0" y="0"/>
+          <a:ext cx="0" cy="0"/>
+          <a:chOff x="0" y="0"/>
+          <a:chExt cx="0" cy="0"/>
+        </a:xfrm>
+      </p:grpSpPr>
+      <p:sp>
+        <p:nvSpPr>
+          <p:cNvPr id="699394" name="Rectangle 2"/>
+          <p:cNvSpPr>
+            <a:spLocks noGrp="1" noChangeArrowheads="1"/>
+          </p:cNvSpPr>
+          <p:nvPr>
+            <p:ph type="title"/>
+          </p:nvPr>
+        </p:nvSpPr>
+        <p:spPr/>
+        <p:txBody>
+          <a:bodyPr>
+            <a:normAutofit fontScale="90000"/>
+          </a:bodyPr>
+          <a:lstStyle/>
+          <a:p>
+            <a:r>
+              <a:rPr lang="en-US" altLang="ko-KR"/>
+              <a:t>JDBC </a:t>
+            </a:r>
+            <a:r>
+              <a:rPr lang="ko-KR" altLang="en-US"/>
+              <a:t>프로그래밍</a:t>
+            </a:r>
+          </a:p>
+        </p:txBody>
+      </p:sp>
+      <p:sp>
+        <p:nvSpPr>
+          <p:cNvPr id="699396" name="Rectangle 4"/>
+          <p:cNvSpPr>
+            <a:spLocks noGrp="1" noChangeArrowheads="1"/>
+          </p:cNvSpPr>
+          <p:nvPr>
+            <p:ph type="body" sz="half" idx="1"/>
+          </p:nvPr>
+        </p:nvSpPr>
+        <p:spPr>
+          <a:xfrm>
+            <a:off x="428596" y="979697"/>
+            <a:ext cx="8218488" cy="5152571"/>
+          </a:xfrm>
+        </p:spPr>
+        <p:txBody>
+          <a:bodyPr/>
+          <a:lstStyle/>
+          <a:p>
+            <a:r>
+              <a:rPr lang="en-US" altLang="ko-KR" dirty="0">
+                <a:latin typeface="Arial" pitchFamily="34" charset="0"/>
+              </a:rPr>
+              <a:t>02.</a:t>
+            </a:r>
+            <a:r>
+              <a:rPr lang="en-US" altLang="ko-KR" dirty="0"/>
+              <a:t> JDBC</a:t>
+            </a:r>
+            <a:r>
+              <a:rPr lang="ko-KR" altLang="en-US" dirty="0"/>
+              <a:t>를 이용한 프로그램 </a:t>
+            </a:r>
+            <a:r>
+              <a:rPr lang="ko-KR" altLang="en-US" dirty="0" smtClean="0"/>
+              <a:t>작성하기</a:t>
+            </a:r>
+            <a:endParaRPr lang="ko-KR" altLang="en-US" sz="2600" dirty="0">
+              <a:solidFill>
+                <a:srgbClr val="4378B5"/>
+              </a:solidFill>
+              <a:latin typeface="Arial Narrow" pitchFamily="34" charset="0"/>
+            </a:endParaRPr>
+          </a:p>
+          <a:p>
+            <a:r>
+              <a:rPr lang="en-US" altLang="ko-KR" sz="2400" dirty="0" smtClean="0"/>
+              <a:t>2</a:t>
+            </a:r>
+            <a:r>
+              <a:rPr lang="ko-KR" altLang="en-US" sz="2400" dirty="0" smtClean="0"/>
+              <a:t>단계 </a:t>
+            </a:r>
+            <a:r>
+              <a:rPr lang="en-US" altLang="ko-KR" sz="2400" dirty="0" smtClean="0"/>
+              <a:t>: DB</a:t>
+            </a:r>
+            <a:r>
+              <a:rPr lang="ko-KR" altLang="en-US" sz="2400" dirty="0" smtClean="0"/>
+              <a:t>연결</a:t>
+            </a:r>
+            <a:r>
+              <a:rPr lang="en-US" altLang="ko-KR" sz="2400" dirty="0" smtClean="0"/>
+              <a:t>(Connection </a:t>
+            </a:r>
+            <a:r>
+              <a:rPr lang="ko-KR" altLang="en-US" sz="2400" dirty="0" smtClean="0"/>
+              <a:t>객체 생성</a:t>
+            </a:r>
+            <a:r>
+              <a:rPr lang="en-US" altLang="ko-KR" sz="2400" dirty="0" smtClean="0"/>
+              <a:t>)</a:t>
+            </a:r>
+          </a:p>
+        </p:txBody>
+      </p:sp>
+      <p:sp>
+        <p:nvSpPr>
+          <p:cNvPr id="7" name="TextBox 6"/>
+          <p:cNvSpPr txBox="1"/>
+          <p:nvPr/>
+        </p:nvSpPr>
+        <p:spPr>
+          <a:xfrm>
+            <a:off x="331912" y="2136312"/>
+            <a:ext cx="8812088" cy="4154984"/>
+          </a:xfrm>
+          <a:prstGeom prst="rect">
+            <a:avLst/>
+          </a:prstGeom>
+          <a:noFill/>
+        </p:spPr>
+        <p:txBody>
+          <a:bodyPr wrap="square" rtlCol="0">
+            <a:spAutoFit/>
+          </a:bodyPr>
+          <a:lstStyle/>
+          <a:p>
+            <a:r>
+              <a:rPr lang="en-US" altLang="ko-KR" sz="2400" dirty="0" smtClean="0"/>
+              <a:t>JDBC URL</a:t>
+            </a:r>
+          </a:p>
+          <a:p>
+            <a:r>
+              <a:rPr lang="ko-KR" altLang="en-US" sz="2400" dirty="0" smtClean="0"/>
+              <a:t>형식</a:t>
+            </a:r>
+            <a:r>
+              <a:rPr lang="en-US" altLang="ko-KR" sz="2400" dirty="0" smtClean="0"/>
+              <a:t>)</a:t>
+            </a:r>
+          </a:p>
+          <a:p>
+            <a:r>
+              <a:rPr lang="en-US" altLang="ko-KR" sz="2400" dirty="0" smtClean="0"/>
+              <a:t>    </a:t>
+            </a:r>
+            <a:r>
+              <a:rPr lang="en-US" altLang="ko-KR" sz="2400" dirty="0" err="1" smtClean="0"/>
+              <a:t>jdbc:oracle:thin</a:t>
+            </a:r>
+            <a:r>
+              <a:rPr lang="en-US" altLang="ko-KR" sz="2400" dirty="0" smtClean="0"/>
+              <a:t>:@HOST:PORT:SID</a:t>
+            </a:r>
+          </a:p>
+          <a:p>
+            <a:r>
+              <a:rPr lang="en-US" altLang="ko-KR" sz="2400" dirty="0" smtClean="0"/>
+              <a:t>    HOST:</a:t>
+            </a:r>
+            <a:r>
+              <a:rPr lang="ko-KR" altLang="en-US" sz="2400" dirty="0" err="1" smtClean="0"/>
+              <a:t>오라클이</a:t>
+            </a:r>
+            <a:r>
+              <a:rPr lang="ko-KR" altLang="en-US" sz="2400" dirty="0" smtClean="0"/>
+              <a:t> 설치된 호스트 주소</a:t>
+            </a:r>
+            <a:endParaRPr lang="en-US" altLang="ko-KR" sz="2400" dirty="0" smtClean="0"/>
+          </a:p>
+          <a:p>
+            <a:r>
+              <a:rPr lang="en-US" altLang="ko-KR" sz="2400" dirty="0" smtClean="0"/>
+              <a:t>    PORT:</a:t>
+            </a:r>
+            <a:r>
+              <a:rPr lang="ko-KR" altLang="en-US" sz="2400" dirty="0" smtClean="0"/>
+              <a:t>포트 번호</a:t>
+            </a:r>
+            <a:endParaRPr lang="en-US" altLang="ko-KR" sz="2400" dirty="0" smtClean="0"/>
+          </a:p>
+          <a:p>
+            <a:endParaRPr lang="en-US" altLang="ko-KR" sz="2400" dirty="0" smtClean="0"/>
+          </a:p>
+          <a:p>
+            <a:r>
+              <a:rPr lang="en-US" altLang="ko-KR" sz="2400" dirty="0" smtClean="0"/>
+              <a:t>    SID:</a:t>
+            </a:r>
+            <a:r>
+              <a:rPr lang="ko-KR" altLang="en-US" sz="2400" dirty="0" smtClean="0"/>
+              <a:t>사용할 데이터 베이스의 </a:t>
+            </a:r>
+            <a:r>
+              <a:rPr lang="en-US" altLang="ko-KR" sz="2400" dirty="0"/>
+              <a:t>SID(System </a:t>
+            </a:r>
+            <a:r>
+              <a:rPr lang="en-US" altLang="ko-KR" sz="2400" dirty="0" smtClean="0"/>
+              <a:t>Identifier)</a:t>
+            </a:r>
+          </a:p>
+          <a:p>
+            <a:r>
+              <a:rPr lang="en-US" altLang="ko-KR" sz="2400" dirty="0" smtClean="0"/>
+              <a:t>   </a:t>
+            </a:r>
+            <a:r>
+              <a:rPr lang="ko-KR" altLang="en-US" sz="2400" dirty="0" err="1"/>
+              <a:t>오라클</a:t>
+            </a:r>
+            <a:r>
+              <a:rPr lang="ko-KR" altLang="en-US" sz="2400" dirty="0"/>
+              <a:t> </a:t>
+            </a:r>
+            <a:r>
+              <a:rPr lang="en-US" altLang="ko-KR" sz="2400" dirty="0"/>
+              <a:t>SID</a:t>
+            </a:r>
+            <a:r>
+              <a:rPr lang="ko-KR" altLang="en-US" sz="2400" dirty="0"/>
+              <a:t>를 확인하는 </a:t>
+            </a:r>
+            <a:r>
+              <a:rPr lang="ko-KR" altLang="en-US" sz="2400" dirty="0" smtClean="0"/>
+              <a:t>방법</a:t>
+            </a:r>
+            <a:r>
+              <a:rPr lang="en-US" altLang="ko-KR" sz="2400" dirty="0" smtClean="0"/>
+              <a:t>(system</a:t>
+            </a:r>
+            <a:r>
+              <a:rPr lang="ko-KR" altLang="en-US" sz="2400" dirty="0" smtClean="0"/>
+              <a:t>계정</a:t>
+            </a:r>
+            <a:r>
+              <a:rPr lang="en-US" altLang="ko-KR" sz="2400" dirty="0" smtClean="0"/>
+              <a:t>)</a:t>
+            </a:r>
+            <a:endParaRPr lang="ko-KR" altLang="en-US" sz="2400" dirty="0"/>
+          </a:p>
+          <a:p>
+            <a:r>
+              <a:rPr lang="en-US" altLang="ko-KR" sz="2400" dirty="0" smtClean="0"/>
+              <a:t>   system&gt;select </a:t>
+            </a:r>
+            <a:r>
+              <a:rPr lang="en-US" altLang="ko-KR" sz="2400" dirty="0"/>
+              <a:t>instance from </a:t>
+            </a:r>
+            <a:r>
+              <a:rPr lang="en-US" altLang="ko-KR" sz="2400" dirty="0" err="1"/>
+              <a:t>v$thread</a:t>
+            </a:r>
+            <a:r>
+              <a:rPr lang="en-US" altLang="ko-KR" sz="2400" dirty="0" smtClean="0"/>
+              <a:t>;</a:t>
+            </a:r>
+          </a:p>
+          <a:p>
+            <a:endParaRPr lang="en-US" altLang="ko-KR" sz="2400" dirty="0"/>
+          </a:p>
+          <a:p>
+            <a:r>
+              <a:rPr lang="en-US" altLang="ko-KR" sz="2400" dirty="0" smtClean="0"/>
+              <a:t>   String </a:t>
+            </a:r>
+            <a:r>
+              <a:rPr lang="en-US" altLang="ko-KR" sz="2400" dirty="0" err="1" smtClean="0"/>
+              <a:t>url</a:t>
+            </a:r>
+            <a:r>
+              <a:rPr lang="en-US" altLang="ko-KR" sz="2400" dirty="0" smtClean="0"/>
+              <a:t> = "</a:t>
+            </a:r>
+            <a:r>
+              <a:rPr lang="en-US" altLang="ko-KR" sz="2400" dirty="0" err="1" smtClean="0"/>
+              <a:t>jdbc:oracle:thin</a:t>
+            </a:r>
+            <a:r>
+              <a:rPr lang="en-US" altLang="ko-KR" sz="2400" dirty="0" smtClean="0"/>
+              <a:t>:@localhost:1521:xe";</a:t>
+            </a:r>
+            <a:endParaRPr lang="ko-KR" altLang="en-US" sz="2400" dirty="0"/>
+          </a:p>
+        </p:txBody>
+      </p:sp>
+    </p:spTree>
+  </p:cSld>
+  <p:clrMapOvr>
+    <a:masterClrMapping/>
+  </p:clrMapOvr>
+  <p:timing>
+    <p:tnLst>
+      <p:par>
+        <p:cTn id="1" dur="indefinite" restart="never" nodeType="tmRoot"/>
+      </p:par>
+    </p:tnLst>
+  </p:timing>
+</p:sld>
+</file>
+
 <file path=ppt/slides/slide2.xml><?xml version="1.0" encoding="utf-8"?>
 <p:sld xmlns:a="http://schemas.openxmlformats.org/drawingml/2006/main" xmlns:r="http://schemas.openxmlformats.org/officeDocument/2006/relationships" xmlns:p="http://schemas.openxmlformats.org/presentationml/2006/main">
   <p:cSld>
@@ -7763,7 +8200,7 @@
     </p:spTree>
     <p:extLst>
       <p:ext uri="{BB962C8B-B14F-4D97-AF65-F5344CB8AC3E}">
-        <p14:creationId xmlns:p14="http://schemas.microsoft.com/office/powerpoint/2010/main" xmlns="" val="64340810"/>
+        <p14:creationId xmlns="" xmlns:p14="http://schemas.microsoft.com/office/powerpoint/2010/main" val="64340810"/>
       </p:ext>
     </p:extLst>
   </p:cSld>
@@ -7864,7 +8301,7 @@
     </p:spTree>
     <p:extLst>
       <p:ext uri="{BB962C8B-B14F-4D97-AF65-F5344CB8AC3E}">
-        <p14:creationId xmlns:p14="http://schemas.microsoft.com/office/powerpoint/2010/main" xmlns="" val="2596504931"/>
+        <p14:creationId xmlns="" xmlns:p14="http://schemas.microsoft.com/office/powerpoint/2010/main" val="2596504931"/>
       </p:ext>
     </p:extLst>
   </p:cSld>
@@ -8939,7 +9376,7 @@
   <a:extraClrSchemeLst/>
   <a:extLst>
     <a:ext uri="{05A4C25C-085E-4340-85A3-A5531E510DB2}">
-      <thm15:themeFamily xmlns:thm15="http://schemas.microsoft.com/office/thememl/2012/main" xmlns="" name="Office Theme" id="{62F939B6-93AF-4DB8-9C6B-D6C7DFDC589F}" vid="{4A3C46E8-61CC-4603-A589-7422A47A8E4A}"/>
+      <thm15:themeFamily xmlns="" xmlns:thm15="http://schemas.microsoft.com/office/thememl/2012/main" name="Office Theme" id="{62F939B6-93AF-4DB8-9C6B-D6C7DFDC589F}" vid="{4A3C46E8-61CC-4603-A589-7422A47A8E4A}"/>
     </a:ext>
   </a:extLst>
 </a:theme>
